--- a/tests/output/pptx-test/06-multi-animation.pptx
+++ b/tests/output/pptx-test/06-multi-animation.pptx
@@ -461,7 +461,7 @@
                   <p:par>
                     <p:cTn id="18" fill="hold">
                       <p:stCondLst>
-                        <p:cond delay="0"/>
+                        <p:cond delay="indefinite"/>
                       </p:stCondLst>
                       <p:childTnLst>
                         <p:par>
